--- a/CareerPath_AI_Presentation.pptx
+++ b/CareerPath_AI_Presentation.pptx
@@ -137,7 +137,7 @@
 <file path=ppt/revisionInfo.xml><?xml version="1.0" encoding="utf-8"?>
 <p1510:revInfo xmlns:a="http://schemas.openxmlformats.org/drawingml/2006/main" xmlns:r="http://schemas.openxmlformats.org/officeDocument/2006/relationships" xmlns:p1510="http://schemas.microsoft.com/office/powerpoint/2015/10/main">
   <p1510:revLst>
-    <p1510:client id="{16840E4F-AFC4-49B9-B33F-5D147A63F135}" v="1" dt="2026-09-25T17:58:05.567"/>
+    <p1510:client id="{16840E4F-AFC4-49B9-B33F-5D147A63F135}" v="3" dt="2026-10-07T07:28:20.498"/>
   </p1510:revLst>
 </p1510:revInfo>
 </file>
@@ -146,19 +146,19 @@
 <pc:chgInfo xmlns:a="http://schemas.openxmlformats.org/drawingml/2006/main" xmlns:r="http://schemas.openxmlformats.org/officeDocument/2006/relationships" xmlns:ac="http://schemas.microsoft.com/office/drawing/2013/main/command" xmlns:pc="http://schemas.microsoft.com/office/powerpoint/2013/main/command">
   <pc:docChgLst>
     <pc:chgData name="rashmiroy2004@outlook.com" userId="9b262ceecccdb4c8" providerId="LiveId" clId="{9DE611EF-83A3-4266-B8CA-B23D7C9EA60E}"/>
-    <pc:docChg chg="custSel delSld modSld">
-      <pc:chgData name="rashmiroy2004@outlook.com" userId="9b262ceecccdb4c8" providerId="LiveId" clId="{9DE611EF-83A3-4266-B8CA-B23D7C9EA60E}" dt="2026-09-25T18:02:46.179" v="237" actId="1076"/>
+    <pc:docChg chg="undo custSel delSld modSld">
+      <pc:chgData name="rashmiroy2004@outlook.com" userId="9b262ceecccdb4c8" providerId="LiveId" clId="{9DE611EF-83A3-4266-B8CA-B23D7C9EA60E}" dt="2026-10-07T07:29:55.947" v="323" actId="1035"/>
       <pc:docMkLst>
         <pc:docMk/>
       </pc:docMkLst>
       <pc:sldChg chg="addSp delSp modSp mod">
-        <pc:chgData name="rashmiroy2004@outlook.com" userId="9b262ceecccdb4c8" providerId="LiveId" clId="{9DE611EF-83A3-4266-B8CA-B23D7C9EA60E}" dt="2026-09-25T18:01:45.525" v="229" actId="207"/>
+        <pc:chgData name="rashmiroy2004@outlook.com" userId="9b262ceecccdb4c8" providerId="LiveId" clId="{9DE611EF-83A3-4266-B8CA-B23D7C9EA60E}" dt="2026-10-07T07:29:55.947" v="323" actId="1035"/>
         <pc:sldMkLst>
           <pc:docMk/>
           <pc:sldMk cId="0" sldId="256"/>
         </pc:sldMkLst>
         <pc:spChg chg="mod">
-          <ac:chgData name="rashmiroy2004@outlook.com" userId="9b262ceecccdb4c8" providerId="LiveId" clId="{9DE611EF-83A3-4266-B8CA-B23D7C9EA60E}" dt="2026-09-25T18:00:14.127" v="162" actId="1076"/>
+          <ac:chgData name="rashmiroy2004@outlook.com" userId="9b262ceecccdb4c8" providerId="LiveId" clId="{9DE611EF-83A3-4266-B8CA-B23D7C9EA60E}" dt="2026-10-07T07:28:19.801" v="240" actId="1076"/>
           <ac:spMkLst>
             <pc:docMk/>
             <pc:sldMk cId="0" sldId="256"/>
@@ -222,7 +222,7 @@
           </ac:spMkLst>
         </pc:spChg>
         <pc:spChg chg="mod">
-          <ac:chgData name="rashmiroy2004@outlook.com" userId="9b262ceecccdb4c8" providerId="LiveId" clId="{9DE611EF-83A3-4266-B8CA-B23D7C9EA60E}" dt="2026-09-25T18:01:45.525" v="229" actId="207"/>
+          <ac:chgData name="rashmiroy2004@outlook.com" userId="9b262ceecccdb4c8" providerId="LiveId" clId="{9DE611EF-83A3-4266-B8CA-B23D7C9EA60E}" dt="2026-10-07T07:29:37.230" v="279" actId="207"/>
           <ac:spMkLst>
             <pc:docMk/>
             <pc:sldMk cId="0" sldId="256"/>
@@ -237,12 +237,12 @@
             <ac:spMk id="25" creationId="{5167DDEF-D725-BD42-FBFC-0C19917B1FB6}"/>
           </ac:spMkLst>
         </pc:spChg>
-        <pc:spChg chg="add del">
-          <ac:chgData name="rashmiroy2004@outlook.com" userId="9b262ceecccdb4c8" providerId="LiveId" clId="{9DE611EF-83A3-4266-B8CA-B23D7C9EA60E}" dt="2026-09-25T17:58:13.154" v="126" actId="478"/>
+        <pc:spChg chg="add mod">
+          <ac:chgData name="rashmiroy2004@outlook.com" userId="9b262ceecccdb4c8" providerId="LiveId" clId="{9DE611EF-83A3-4266-B8CA-B23D7C9EA60E}" dt="2026-10-07T07:29:55.947" v="323" actId="1035"/>
           <ac:spMkLst>
             <pc:docMk/>
             <pc:sldMk cId="0" sldId="256"/>
-            <ac:spMk id="27" creationId="{00248607-1F42-FECC-37EA-FA8EFCC98762}"/>
+            <ac:spMk id="26" creationId="{110A6491-C4F9-59A4-8131-254FA28F1F7A}"/>
           </ac:spMkLst>
         </pc:spChg>
       </pc:sldChg>
@@ -300,13 +300,6 @@
             <ac:spMk id="35" creationId="{00000000-0000-0000-0000-000000000000}"/>
           </ac:spMkLst>
         </pc:spChg>
-      </pc:sldChg>
-      <pc:sldChg chg="del">
-        <pc:chgData name="rashmiroy2004@outlook.com" userId="9b262ceecccdb4c8" providerId="LiveId" clId="{9DE611EF-83A3-4266-B8CA-B23D7C9EA60E}" dt="2026-09-25T18:01:59.859" v="230" actId="47"/>
-        <pc:sldMkLst>
-          <pc:docMk/>
-          <pc:sldMk cId="0" sldId="268"/>
-        </pc:sldMkLst>
       </pc:sldChg>
     </pc:docChg>
   </pc:docChgLst>
@@ -658,7 +651,7 @@
           <a:p>
             <a:fld id="{5BCAD085-E8A6-8845-BD4E-CB4CCA059FC4}" type="datetimeFigureOut">
               <a:rPr lang="en-US" smtClean="0"/>
-              <a:t>9/25/2026</a:t>
+              <a:t>10/7/2026</a:t>
             </a:fld>
             <a:endParaRPr lang="en-US"/>
           </a:p>
@@ -826,7 +819,7 @@
           <a:p>
             <a:fld id="{5BCAD085-E8A6-8845-BD4E-CB4CCA059FC4}" type="datetimeFigureOut">
               <a:rPr lang="en-US" smtClean="0"/>
-              <a:t>9/25/2026</a:t>
+              <a:t>10/7/2026</a:t>
             </a:fld>
             <a:endParaRPr lang="en-US"/>
           </a:p>
@@ -1004,7 +997,7 @@
           <a:p>
             <a:fld id="{5BCAD085-E8A6-8845-BD4E-CB4CCA059FC4}" type="datetimeFigureOut">
               <a:rPr lang="en-US" smtClean="0"/>
-              <a:t>9/25/2026</a:t>
+              <a:t>10/7/2026</a:t>
             </a:fld>
             <a:endParaRPr lang="en-US"/>
           </a:p>
@@ -1172,7 +1165,7 @@
           <a:p>
             <a:fld id="{5BCAD085-E8A6-8845-BD4E-CB4CCA059FC4}" type="datetimeFigureOut">
               <a:rPr lang="en-US" smtClean="0"/>
-              <a:t>9/25/2026</a:t>
+              <a:t>10/7/2026</a:t>
             </a:fld>
             <a:endParaRPr lang="en-US"/>
           </a:p>
@@ -1417,7 +1410,7 @@
           <a:p>
             <a:fld id="{5BCAD085-E8A6-8845-BD4E-CB4CCA059FC4}" type="datetimeFigureOut">
               <a:rPr lang="en-US" smtClean="0"/>
-              <a:t>9/25/2026</a:t>
+              <a:t>10/7/2026</a:t>
             </a:fld>
             <a:endParaRPr lang="en-US"/>
           </a:p>
@@ -1702,7 +1695,7 @@
           <a:p>
             <a:fld id="{5BCAD085-E8A6-8845-BD4E-CB4CCA059FC4}" type="datetimeFigureOut">
               <a:rPr lang="en-US" smtClean="0"/>
-              <a:t>9/25/2026</a:t>
+              <a:t>10/7/2026</a:t>
             </a:fld>
             <a:endParaRPr lang="en-US"/>
           </a:p>
@@ -2121,7 +2114,7 @@
           <a:p>
             <a:fld id="{5BCAD085-E8A6-8845-BD4E-CB4CCA059FC4}" type="datetimeFigureOut">
               <a:rPr lang="en-US" smtClean="0"/>
-              <a:t>9/25/2026</a:t>
+              <a:t>10/7/2026</a:t>
             </a:fld>
             <a:endParaRPr lang="en-US"/>
           </a:p>
@@ -2238,7 +2231,7 @@
           <a:p>
             <a:fld id="{5BCAD085-E8A6-8845-BD4E-CB4CCA059FC4}" type="datetimeFigureOut">
               <a:rPr lang="en-US" smtClean="0"/>
-              <a:t>9/25/2026</a:t>
+              <a:t>10/7/2026</a:t>
             </a:fld>
             <a:endParaRPr lang="en-US"/>
           </a:p>
@@ -2333,7 +2326,7 @@
           <a:p>
             <a:fld id="{5BCAD085-E8A6-8845-BD4E-CB4CCA059FC4}" type="datetimeFigureOut">
               <a:rPr lang="en-US" smtClean="0"/>
-              <a:t>9/25/2026</a:t>
+              <a:t>10/7/2026</a:t>
             </a:fld>
             <a:endParaRPr lang="en-US"/>
           </a:p>
@@ -2608,7 +2601,7 @@
           <a:p>
             <a:fld id="{5BCAD085-E8A6-8845-BD4E-CB4CCA059FC4}" type="datetimeFigureOut">
               <a:rPr lang="en-US" smtClean="0"/>
-              <a:t>9/25/2026</a:t>
+              <a:t>10/7/2026</a:t>
             </a:fld>
             <a:endParaRPr lang="en-US"/>
           </a:p>
@@ -2860,7 +2853,7 @@
           <a:p>
             <a:fld id="{5BCAD085-E8A6-8845-BD4E-CB4CCA059FC4}" type="datetimeFigureOut">
               <a:rPr lang="en-US" smtClean="0"/>
-              <a:t>9/25/2026</a:t>
+              <a:t>10/7/2026</a:t>
             </a:fld>
             <a:endParaRPr lang="en-US"/>
           </a:p>
@@ -3071,7 +3064,7 @@
           <a:p>
             <a:fld id="{5BCAD085-E8A6-8845-BD4E-CB4CCA059FC4}" type="datetimeFigureOut">
               <a:rPr lang="en-US" smtClean="0"/>
-              <a:t>9/25/2026</a:t>
+              <a:t>10/7/2026</a:t>
             </a:fld>
             <a:endParaRPr lang="en-US"/>
           </a:p>
@@ -4193,6 +4186,7 @@
               </a:defRPr>
             </a:pPr>
             <a:r>
+              <a:rPr dirty="0"/>
               <a:t>ML / NLP Engineer</a:t>
             </a:r>
           </a:p>
@@ -4333,7 +4327,7 @@
         <p:spPr>
           <a:xfrm>
             <a:off x="8309794" y="5240889"/>
-            <a:ext cx="1265090" cy="446276"/>
+            <a:ext cx="1239442" cy="800219"/>
           </a:xfrm>
           <a:prstGeom prst="rect">
             <a:avLst/>
@@ -4391,9 +4385,51 @@
               </a:rPr>
               <a:t>Full Stack Developer</a:t>
             </a:r>
+          </a:p>
+          <a:p>
+            <a:pPr>
+              <a:defRPr sz="1000">
+                <a:solidFill>
+                  <a:srgbClr val="93C5FD"/>
+                </a:solidFill>
+              </a:defRPr>
+            </a:pPr>
+            <a:r>
+              <a:rPr lang="en-US" sz="1000" dirty="0">
+                <a:solidFill>
+                  <a:schemeClr val="accent5"/>
+                </a:solidFill>
+              </a:rPr>
+              <a:t> </a:t>
+            </a:r>
+            <a:r>
+              <a:rPr lang="en-US" sz="1300" b="1" dirty="0">
+                <a:solidFill>
+                  <a:schemeClr val="bg1"/>
+                </a:solidFill>
+              </a:rPr>
+              <a:t>Sonal</a:t>
+            </a:r>
+          </a:p>
+          <a:p>
+            <a:pPr>
+              <a:defRPr sz="1000">
+                <a:solidFill>
+                  <a:srgbClr val="93C5FD"/>
+                </a:solidFill>
+              </a:defRPr>
+            </a:pPr>
+            <a:r>
+              <a:rPr lang="en-US" sz="1000" dirty="0">
+                <a:solidFill>
+                  <a:schemeClr val="accent1"/>
+                </a:solidFill>
+              </a:rPr>
+              <a:t>Full stack Developer</a:t>
+            </a:r>
             <a:endParaRPr sz="1000" dirty="0">
               <a:solidFill>
-                <a:schemeClr val="accent5"/>
+                <a:schemeClr val="accent1"/>
               </a:solidFill>
             </a:endParaRPr>
           </a:p>
@@ -4414,6 +4450,56 @@
         <p:spPr>
           <a:xfrm>
             <a:off x="8097356" y="5331642"/>
+            <a:ext cx="109728" cy="109728"/>
+          </a:xfrm>
+          <a:prstGeom prst="ellipse">
+            <a:avLst/>
+          </a:prstGeom>
+          <a:solidFill>
+            <a:srgbClr val="3B82F6"/>
+          </a:solidFill>
+          <a:ln>
+            <a:noFill/>
+          </a:ln>
+        </p:spPr>
+        <p:style>
+          <a:lnRef idx="1">
+            <a:schemeClr val="accent1"/>
+          </a:lnRef>
+          <a:fillRef idx="3">
+            <a:schemeClr val="accent1"/>
+          </a:fillRef>
+          <a:effectRef idx="2">
+            <a:schemeClr val="accent1"/>
+          </a:effectRef>
+          <a:fontRef idx="minor">
+            <a:schemeClr val="lt1"/>
+          </a:fontRef>
+        </p:style>
+        <p:txBody>
+          <a:bodyPr rtlCol="0" anchor="ctr"/>
+          <a:lstStyle/>
+          <a:p>
+            <a:pPr algn="ctr"/>
+            <a:endParaRPr/>
+          </a:p>
+        </p:txBody>
+      </p:sp>
+      <p:sp>
+        <p:nvSpPr>
+          <p:cNvPr id="26" name="Oval 25">
+            <a:extLst>
+              <a:ext uri="{FF2B5EF4-FFF2-40B4-BE49-F238E27FC236}">
+                <a16:creationId xmlns:a16="http://schemas.microsoft.com/office/drawing/2014/main" id="{110A6491-C4F9-59A4-8131-254FA28F1F7A}"/>
+              </a:ext>
+            </a:extLst>
+          </p:cNvPr>
+          <p:cNvSpPr/>
+          <p:nvPr/>
+        </p:nvSpPr>
+        <p:spPr>
+          <a:xfrm>
+            <a:off x="8092443" y="5690523"/>
             <a:ext cx="109728" cy="109728"/>
           </a:xfrm>
           <a:prstGeom prst="ellipse">

--- a/CareerPath_AI_Presentation.pptx
+++ b/CareerPath_AI_Presentation.pptx
@@ -21,6 +21,8 @@
     <p:sldId id="269" r:id="rId20"/>
     <p:sldId id="270" r:id="rId21"/>
     <p:sldId id="271" r:id="rId22"/>
+    <p:sldId id="272" r:id="rId23"/>
+    <p:sldId id="273" r:id="rId24"/>
   </p:sldIdLst>
   <p:sldSz cx="12191695" cy="6858000" type="screen4x3"/>
   <p:notesSz cx="6858000" cy="9144000"/>
@@ -3723,7 +3725,7 @@
               </a:defRPr>
             </a:pPr>
             <a:r>
-              <a:t>10 / 16</a:t>
+              <a:t>10 / 18</a:t>
             </a:r>
           </a:p>
         </p:txBody>
@@ -5553,7 +5555,7 @@
               </a:defRPr>
             </a:pPr>
             <a:r>
-              <a:t>11 / 16</a:t>
+              <a:t>11 / 18</a:t>
             </a:r>
           </a:p>
         </p:txBody>
@@ -6616,7 +6618,7 @@
               </a:defRPr>
             </a:pPr>
             <a:r>
-              <a:t>12 / 16</a:t>
+              <a:t>12 / 18</a:t>
             </a:r>
           </a:p>
         </p:txBody>
@@ -7560,7 +7562,7 @@
               </a:defRPr>
             </a:pPr>
             <a:r>
-              <a:t>13 / 16</a:t>
+              <a:t>13 / 18</a:t>
             </a:r>
           </a:p>
         </p:txBody>
@@ -8106,7 +8108,7 @@
               </a:defRPr>
             </a:pPr>
             <a:r>
-              <a:t>14 / 16</a:t>
+              <a:t>14 / 18</a:t>
             </a:r>
           </a:p>
         </p:txBody>
@@ -8941,7 +8943,7 @@
               </a:defRPr>
             </a:pPr>
             <a:r>
-              <a:t>15 / 16</a:t>
+              <a:t>15 / 18</a:t>
             </a:r>
           </a:p>
         </p:txBody>
@@ -9941,6 +9943,1775 @@
         <p:spPr>
           <a:xfrm>
             <a:off x="0" y="0"/>
+            <a:ext cx="12191695" cy="54864"/>
+          </a:xfrm>
+          <a:prstGeom prst="rect">
+            <a:avLst/>
+          </a:prstGeom>
+          <a:solidFill>
+            <a:srgbClr val="2563EB"/>
+          </a:solidFill>
+          <a:ln>
+            <a:noFill/>
+          </a:ln>
+        </p:spPr>
+        <p:style>
+          <a:lnRef idx="1">
+            <a:schemeClr val="accent1"/>
+          </a:lnRef>
+          <a:fillRef idx="3">
+            <a:schemeClr val="accent1"/>
+          </a:fillRef>
+          <a:effectRef idx="2">
+            <a:schemeClr val="accent1"/>
+          </a:effectRef>
+          <a:fontRef idx="minor">
+            <a:schemeClr val="lt1"/>
+          </a:fontRef>
+        </p:style>
+        <p:txBody>
+          <a:bodyPr rtlCol="0" anchor="ctr"/>
+          <a:lstStyle/>
+          <a:p>
+            <a:pPr algn="ctr"/>
+          </a:p>
+        </p:txBody>
+      </p:sp>
+      <p:sp>
+        <p:nvSpPr>
+          <p:cNvPr id="3" name="Rectangle 2"/>
+          <p:cNvSpPr/>
+          <p:nvPr/>
+        </p:nvSpPr>
+        <p:spPr>
+          <a:xfrm>
+            <a:off x="0" y="6473952"/>
+            <a:ext cx="12191695" cy="384048"/>
+          </a:xfrm>
+          <a:prstGeom prst="rect">
+            <a:avLst/>
+          </a:prstGeom>
+          <a:solidFill>
+            <a:srgbClr val="F8FAFC"/>
+          </a:solidFill>
+          <a:ln w="6350">
+            <a:solidFill>
+              <a:srgbClr val="CBD5E1"/>
+            </a:solidFill>
+          </a:ln>
+        </p:spPr>
+        <p:style>
+          <a:lnRef idx="1">
+            <a:schemeClr val="accent1"/>
+          </a:lnRef>
+          <a:fillRef idx="3">
+            <a:schemeClr val="accent1"/>
+          </a:fillRef>
+          <a:effectRef idx="2">
+            <a:schemeClr val="accent1"/>
+          </a:effectRef>
+          <a:fontRef idx="minor">
+            <a:schemeClr val="lt1"/>
+          </a:fontRef>
+        </p:style>
+        <p:txBody>
+          <a:bodyPr rtlCol="0" anchor="ctr" lIns="731520"/>
+          <a:lstStyle/>
+          <a:p>
+            <a:pPr algn="l">
+              <a:defRPr sz="850">
+                <a:solidFill>
+                  <a:srgbClr val="475569"/>
+                </a:solidFill>
+              </a:defRPr>
+            </a:pPr>
+            <a:r>
+              <a:t>CareerPath AI  |  SAS &amp; CU Hackathon  ·  Round 2 Technical Evaluation  |  Build For Bharat 2.0</a:t>
+            </a:r>
+          </a:p>
+        </p:txBody>
+      </p:sp>
+      <p:sp>
+        <p:nvSpPr>
+          <p:cNvPr id="4" name="TextBox 3"/>
+          <p:cNvSpPr txBox="1"/>
+          <p:nvPr/>
+        </p:nvSpPr>
+        <p:spPr>
+          <a:xfrm>
+            <a:off x="10789920" y="6492240"/>
+            <a:ext cx="1097280" cy="320040"/>
+          </a:xfrm>
+          <a:prstGeom prst="rect">
+            <a:avLst/>
+          </a:prstGeom>
+          <a:noFill/>
+        </p:spPr>
+        <p:txBody>
+          <a:bodyPr wrap="none">
+            <a:spAutoFit/>
+          </a:bodyPr>
+          <a:lstStyle/>
+          <a:p>
+            <a:pPr algn="r">
+              <a:defRPr sz="850" b="1">
+                <a:solidFill>
+                  <a:srgbClr val="475569"/>
+                </a:solidFill>
+              </a:defRPr>
+            </a:pPr>
+            <a:r>
+              <a:t>16 / 18</a:t>
+            </a:r>
+          </a:p>
+        </p:txBody>
+      </p:sp>
+      <p:sp>
+        <p:nvSpPr>
+          <p:cNvPr id="5" name="Rounded Rectangle 4"/>
+          <p:cNvSpPr/>
+          <p:nvPr/>
+        </p:nvSpPr>
+        <p:spPr>
+          <a:xfrm>
+            <a:off x="731520" y="201168"/>
+            <a:ext cx="3474720" cy="292608"/>
+          </a:xfrm>
+          <a:prstGeom prst="roundRect">
+            <a:avLst/>
+          </a:prstGeom>
+          <a:solidFill>
+            <a:srgbClr val="EEF2FF"/>
+          </a:solidFill>
+          <a:ln w="12700">
+            <a:solidFill>
+              <a:srgbClr val="818CF8"/>
+            </a:solidFill>
+          </a:ln>
+        </p:spPr>
+        <p:style>
+          <a:lnRef idx="1">
+            <a:schemeClr val="accent1"/>
+          </a:lnRef>
+          <a:fillRef idx="3">
+            <a:schemeClr val="accent1"/>
+          </a:fillRef>
+          <a:effectRef idx="2">
+            <a:schemeClr val="accent1"/>
+          </a:effectRef>
+          <a:fontRef idx="minor">
+            <a:schemeClr val="lt1"/>
+          </a:fontRef>
+        </p:style>
+        <p:txBody>
+          <a:bodyPr rtlCol="0" anchor="ctr"/>
+          <a:lstStyle/>
+          <a:p>
+            <a:pPr algn="ctr">
+              <a:defRPr sz="950" b="1">
+                <a:solidFill>
+                  <a:srgbClr val="3730A3"/>
+                </a:solidFill>
+              </a:defRPr>
+            </a:pPr>
+            <a:r>
+              <a:t>★ Jury Advisory · Future Implementation (Part 1)</a:t>
+            </a:r>
+          </a:p>
+        </p:txBody>
+      </p:sp>
+      <p:sp>
+        <p:nvSpPr>
+          <p:cNvPr id="6" name="TextBox 5"/>
+          <p:cNvSpPr txBox="1"/>
+          <p:nvPr/>
+        </p:nvSpPr>
+        <p:spPr>
+          <a:xfrm>
+            <a:off x="731520" y="548640"/>
+            <a:ext cx="10698480" cy="731520"/>
+          </a:xfrm>
+          <a:prstGeom prst="rect">
+            <a:avLst/>
+          </a:prstGeom>
+          <a:noFill/>
+        </p:spPr>
+        <p:txBody>
+          <a:bodyPr wrap="square">
+            <a:spAutoFit/>
+          </a:bodyPr>
+          <a:lstStyle/>
+          <a:p>
+            <a:pPr>
+              <a:defRPr sz="2200" b="1">
+                <a:solidFill>
+                  <a:srgbClr val="1E3A8A"/>
+                </a:solidFill>
+              </a:defRPr>
+            </a:pPr>
+            <a:r>
+              <a:t>Future Implementation: Proctored Skill Verification &amp; Live LMS Tracking</a:t>
+            </a:r>
+          </a:p>
+          <a:p>
+            <a:pPr>
+              <a:spcBef>
+                <a:spcPts val="200"/>
+              </a:spcBef>
+              <a:defRPr sz="1100">
+                <a:solidFill>
+                  <a:srgbClr val="475569"/>
+                </a:solidFill>
+              </a:defRPr>
+            </a:pPr>
+            <a:r>
+              <a:t>Addressing Top-30 Jury Advisory: Eliminating resume exaggeration through adaptive micro-assessments, secure proctoring, and live platform sync.</a:t>
+            </a:r>
+          </a:p>
+        </p:txBody>
+      </p:sp>
+      <p:sp>
+        <p:nvSpPr>
+          <p:cNvPr id="7" name="Rounded Rectangle 6"/>
+          <p:cNvSpPr/>
+          <p:nvPr/>
+        </p:nvSpPr>
+        <p:spPr>
+          <a:xfrm>
+            <a:off x="731520" y="1280160"/>
+            <a:ext cx="3474720" cy="3474720"/>
+          </a:xfrm>
+          <a:prstGeom prst="roundRect">
+            <a:avLst/>
+          </a:prstGeom>
+          <a:solidFill>
+            <a:srgbClr val="FFFFFF"/>
+          </a:solidFill>
+          <a:ln w="12700">
+            <a:solidFill>
+              <a:srgbClr val="EA580C"/>
+            </a:solidFill>
+          </a:ln>
+        </p:spPr>
+        <p:style>
+          <a:lnRef idx="1">
+            <a:schemeClr val="accent1"/>
+          </a:lnRef>
+          <a:fillRef idx="3">
+            <a:schemeClr val="accent1"/>
+          </a:fillRef>
+          <a:effectRef idx="2">
+            <a:schemeClr val="accent1"/>
+          </a:effectRef>
+          <a:fontRef idx="minor">
+            <a:schemeClr val="lt1"/>
+          </a:fontRef>
+        </p:style>
+        <p:txBody>
+          <a:bodyPr rtlCol="0" anchor="ctr"/>
+          <a:lstStyle/>
+          <a:p>
+            <a:pPr algn="ctr"/>
+          </a:p>
+        </p:txBody>
+      </p:sp>
+      <p:sp>
+        <p:nvSpPr>
+          <p:cNvPr id="8" name="TextBox 7"/>
+          <p:cNvSpPr txBox="1"/>
+          <p:nvPr/>
+        </p:nvSpPr>
+        <p:spPr>
+          <a:xfrm>
+            <a:off x="868680" y="1371600"/>
+            <a:ext cx="3200400" cy="320040"/>
+          </a:xfrm>
+          <a:prstGeom prst="rect">
+            <a:avLst/>
+          </a:prstGeom>
+          <a:noFill/>
+        </p:spPr>
+        <p:txBody>
+          <a:bodyPr wrap="none">
+            <a:spAutoFit/>
+          </a:bodyPr>
+          <a:lstStyle/>
+          <a:p>
+            <a:pPr>
+              <a:defRPr sz="1100" b="1">
+                <a:solidFill>
+                  <a:srgbClr val="EA580C"/>
+                </a:solidFill>
+              </a:defRPr>
+            </a:pPr>
+            <a:r>
+              <a:t>1. Resume Fraud &amp; Exaggeration Defense</a:t>
+            </a:r>
+          </a:p>
+        </p:txBody>
+      </p:sp>
+      <p:sp>
+        <p:nvSpPr>
+          <p:cNvPr id="9" name="TextBox 8"/>
+          <p:cNvSpPr txBox="1"/>
+          <p:nvPr/>
+        </p:nvSpPr>
+        <p:spPr>
+          <a:xfrm>
+            <a:off x="868680" y="1691640"/>
+            <a:ext cx="3200400" cy="2971800"/>
+          </a:xfrm>
+          <a:prstGeom prst="rect">
+            <a:avLst/>
+          </a:prstGeom>
+          <a:noFill/>
+        </p:spPr>
+        <p:txBody>
+          <a:bodyPr wrap="square">
+            <a:spAutoFit/>
+          </a:bodyPr>
+          <a:lstStyle/>
+          <a:p>
+            <a:pPr>
+              <a:spcBef>
+                <a:spcPts val="300"/>
+              </a:spcBef>
+              <a:defRPr b="1" sz="850">
+                <a:solidFill>
+                  <a:srgbClr val="EA580C"/>
+                </a:solidFill>
+              </a:defRPr>
+            </a:pPr>
+            <a:r>
+              <a:t>• The Industry Vulnerability: </a:t>
+            </a:r>
+            <a:r>
+              <a:rPr b="0" sz="800">
+                <a:solidFill>
+                  <a:srgbClr val="0F172A"/>
+                </a:solidFill>
+              </a:rPr>
+              <a:t>Candidates routinely list inflated or unverified keywords on resumes that do not reflect working technical proficiency.</a:t>
+            </a:r>
+          </a:p>
+          <a:p>
+            <a:pPr>
+              <a:spcBef>
+                <a:spcPts val="300"/>
+              </a:spcBef>
+              <a:defRPr b="1" sz="850">
+                <a:solidFill>
+                  <a:srgbClr val="EA580C"/>
+                </a:solidFill>
+              </a:defRPr>
+            </a:pPr>
+            <a:r>
+              <a:t>• Dual-Status Verification: </a:t>
+            </a:r>
+            <a:r>
+              <a:rPr b="0" sz="800">
+                <a:solidFill>
+                  <a:srgbClr val="0F172A"/>
+                </a:solidFill>
+              </a:rPr>
+              <a:t>Skills initialize as 'Self-Declared' (0.5x weight in matching). Upgraded to 'Empirically Verified' (1.0x weight) strictly post-evaluation.</a:t>
+            </a:r>
+          </a:p>
+          <a:p>
+            <a:pPr>
+              <a:spcBef>
+                <a:spcPts val="300"/>
+              </a:spcBef>
+              <a:defRPr b="1" sz="850">
+                <a:solidFill>
+                  <a:srgbClr val="EA580C"/>
+                </a:solidFill>
+              </a:defRPr>
+            </a:pPr>
+            <a:r>
+              <a:t>• Semantic Cross-Validation: </a:t>
+            </a:r>
+            <a:r>
+              <a:rPr b="0" sz="800">
+                <a:solidFill>
+                  <a:srgbClr val="0F172A"/>
+                </a:solidFill>
+              </a:rPr>
+              <a:t>NLP entity parser cross-references claimed skills against project repos, commit histories, and coursework context to flag anomalies.</a:t>
+            </a:r>
+          </a:p>
+          <a:p>
+            <a:pPr>
+              <a:spcBef>
+                <a:spcPts val="300"/>
+              </a:spcBef>
+              <a:defRPr b="1" sz="850">
+                <a:solidFill>
+                  <a:srgbClr val="EA580C"/>
+                </a:solidFill>
+              </a:defRPr>
+            </a:pPr>
+            <a:r>
+              <a:t>• Recruiter Authenticity Index: </a:t>
+            </a:r>
+            <a:r>
+              <a:rPr b="0" sz="800">
+                <a:solidFill>
+                  <a:srgbClr val="0F172A"/>
+                </a:solidFill>
+              </a:rPr>
+              <a:t>Outputs a verified 'Candidate Authenticity Score (0-100%)' providing transparent trust metrics to hiring partners.</a:t>
+            </a:r>
+          </a:p>
+        </p:txBody>
+      </p:sp>
+      <p:sp>
+        <p:nvSpPr>
+          <p:cNvPr id="10" name="Rounded Rectangle 9"/>
+          <p:cNvSpPr/>
+          <p:nvPr/>
+        </p:nvSpPr>
+        <p:spPr>
+          <a:xfrm>
+            <a:off x="4343400" y="1280160"/>
+            <a:ext cx="3474720" cy="3474720"/>
+          </a:xfrm>
+          <a:prstGeom prst="roundRect">
+            <a:avLst/>
+          </a:prstGeom>
+          <a:solidFill>
+            <a:srgbClr val="FFFFFF"/>
+          </a:solidFill>
+          <a:ln w="12700">
+            <a:solidFill>
+              <a:srgbClr val="1E3A8A"/>
+            </a:solidFill>
+          </a:ln>
+        </p:spPr>
+        <p:style>
+          <a:lnRef idx="1">
+            <a:schemeClr val="accent1"/>
+          </a:lnRef>
+          <a:fillRef idx="3">
+            <a:schemeClr val="accent1"/>
+          </a:fillRef>
+          <a:effectRef idx="2">
+            <a:schemeClr val="accent1"/>
+          </a:effectRef>
+          <a:fontRef idx="minor">
+            <a:schemeClr val="lt1"/>
+          </a:fontRef>
+        </p:style>
+        <p:txBody>
+          <a:bodyPr rtlCol="0" anchor="ctr"/>
+          <a:lstStyle/>
+          <a:p>
+            <a:pPr algn="ctr"/>
+          </a:p>
+        </p:txBody>
+      </p:sp>
+      <p:sp>
+        <p:nvSpPr>
+          <p:cNvPr id="11" name="TextBox 10"/>
+          <p:cNvSpPr txBox="1"/>
+          <p:nvPr/>
+        </p:nvSpPr>
+        <p:spPr>
+          <a:xfrm>
+            <a:off x="4480560" y="1371600"/>
+            <a:ext cx="3200400" cy="320040"/>
+          </a:xfrm>
+          <a:prstGeom prst="rect">
+            <a:avLst/>
+          </a:prstGeom>
+          <a:noFill/>
+        </p:spPr>
+        <p:txBody>
+          <a:bodyPr wrap="none">
+            <a:spAutoFit/>
+          </a:bodyPr>
+          <a:lstStyle/>
+          <a:p>
+            <a:pPr>
+              <a:defRPr sz="1100" b="1">
+                <a:solidFill>
+                  <a:srgbClr val="1E3A8A"/>
+                </a:solidFill>
+              </a:defRPr>
+            </a:pPr>
+            <a:r>
+              <a:t>2. Adaptive 10-Question Micro-Assessments</a:t>
+            </a:r>
+          </a:p>
+        </p:txBody>
+      </p:sp>
+      <p:sp>
+        <p:nvSpPr>
+          <p:cNvPr id="12" name="TextBox 11"/>
+          <p:cNvSpPr txBox="1"/>
+          <p:nvPr/>
+        </p:nvSpPr>
+        <p:spPr>
+          <a:xfrm>
+            <a:off x="4480560" y="1691640"/>
+            <a:ext cx="3200400" cy="2971800"/>
+          </a:xfrm>
+          <a:prstGeom prst="rect">
+            <a:avLst/>
+          </a:prstGeom>
+          <a:noFill/>
+        </p:spPr>
+        <p:txBody>
+          <a:bodyPr wrap="square">
+            <a:spAutoFit/>
+          </a:bodyPr>
+          <a:lstStyle/>
+          <a:p>
+            <a:pPr>
+              <a:spcBef>
+                <a:spcPts val="300"/>
+              </a:spcBef>
+              <a:defRPr b="1" sz="850">
+                <a:solidFill>
+                  <a:srgbClr val="1E3A8A"/>
+                </a:solidFill>
+              </a:defRPr>
+            </a:pPr>
+            <a:r>
+              <a:t>• Dynamic Micro-Assessments: </a:t>
+            </a:r>
+            <a:r>
+              <a:rPr b="0" sz="800">
+                <a:solidFill>
+                  <a:srgbClr val="0F172A"/>
+                </a:solidFill>
+              </a:rPr>
+              <a:t>Targeted 10-question evaluation dynamically assembled per claimed skill (e.g. React hooks, SQL indexing, Docker networking).</a:t>
+            </a:r>
+          </a:p>
+          <a:p>
+            <a:pPr>
+              <a:spcBef>
+                <a:spcPts val="300"/>
+              </a:spcBef>
+              <a:defRPr b="1" sz="850">
+                <a:solidFill>
+                  <a:srgbClr val="1E3A8A"/>
+                </a:solidFill>
+              </a:defRPr>
+            </a:pPr>
+            <a:r>
+              <a:t>• Tri-Tier Question Taxonomy: </a:t>
+            </a:r>
+            <a:r>
+              <a:rPr b="0" sz="800">
+                <a:solidFill>
+                  <a:srgbClr val="0F172A"/>
+                </a:solidFill>
+              </a:rPr>
+              <a:t>4 Conceptual/Syntax questions, 4 Practical Architecture/Scenario problems, and 2 Code Debugging / Output prediction challenges.</a:t>
+            </a:r>
+          </a:p>
+          <a:p>
+            <a:pPr>
+              <a:spcBef>
+                <a:spcPts val="300"/>
+              </a:spcBef>
+              <a:defRPr b="1" sz="850">
+                <a:solidFill>
+                  <a:srgbClr val="1E3A8A"/>
+                </a:solidFill>
+              </a:defRPr>
+            </a:pPr>
+            <a:r>
+              <a:t>• Strict 70-80% Passing Bar: </a:t>
+            </a:r>
+            <a:r>
+              <a:rPr b="0" sz="800">
+                <a:solidFill>
+                  <a:srgbClr val="0F172A"/>
+                </a:solidFill>
+              </a:rPr>
+              <a:t>Candidate must score at least 7 to 8 correct out of 10 (≥70-80%) to verify competency and earn the official verifiable badge.</a:t>
+            </a:r>
+          </a:p>
+          <a:p>
+            <a:pPr>
+              <a:spcBef>
+                <a:spcPts val="300"/>
+              </a:spcBef>
+              <a:defRPr b="1" sz="850">
+                <a:solidFill>
+                  <a:srgbClr val="1E3A8A"/>
+                </a:solidFill>
+              </a:defRPr>
+            </a:pPr>
+            <a:r>
+              <a:t>• Adaptive Difficulty Scaling: </a:t>
+            </a:r>
+            <a:r>
+              <a:rPr b="0" sz="800">
+                <a:solidFill>
+                  <a:srgbClr val="0F172A"/>
+                </a:solidFill>
+              </a:rPr>
+              <a:t>Item Response Theory (IRT) adjusts question complexity in real time to accurately measure true junior vs mid-level competence.</a:t>
+            </a:r>
+          </a:p>
+        </p:txBody>
+      </p:sp>
+      <p:sp>
+        <p:nvSpPr>
+          <p:cNvPr id="13" name="Rounded Rectangle 12"/>
+          <p:cNvSpPr/>
+          <p:nvPr/>
+        </p:nvSpPr>
+        <p:spPr>
+          <a:xfrm>
+            <a:off x="7955279" y="1280160"/>
+            <a:ext cx="3474720" cy="3474720"/>
+          </a:xfrm>
+          <a:prstGeom prst="roundRect">
+            <a:avLst/>
+          </a:prstGeom>
+          <a:solidFill>
+            <a:srgbClr val="FFFFFF"/>
+          </a:solidFill>
+          <a:ln w="12700">
+            <a:solidFill>
+              <a:srgbClr val="DC2626"/>
+            </a:solidFill>
+          </a:ln>
+        </p:spPr>
+        <p:style>
+          <a:lnRef idx="1">
+            <a:schemeClr val="accent1"/>
+          </a:lnRef>
+          <a:fillRef idx="3">
+            <a:schemeClr val="accent1"/>
+          </a:fillRef>
+          <a:effectRef idx="2">
+            <a:schemeClr val="accent1"/>
+          </a:effectRef>
+          <a:fontRef idx="minor">
+            <a:schemeClr val="lt1"/>
+          </a:fontRef>
+        </p:style>
+        <p:txBody>
+          <a:bodyPr rtlCol="0" anchor="ctr"/>
+          <a:lstStyle/>
+          <a:p>
+            <a:pPr algn="ctr"/>
+          </a:p>
+        </p:txBody>
+      </p:sp>
+      <p:sp>
+        <p:nvSpPr>
+          <p:cNvPr id="14" name="TextBox 13"/>
+          <p:cNvSpPr txBox="1"/>
+          <p:nvPr/>
+        </p:nvSpPr>
+        <p:spPr>
+          <a:xfrm>
+            <a:off x="8092439" y="1371600"/>
+            <a:ext cx="3200400" cy="320040"/>
+          </a:xfrm>
+          <a:prstGeom prst="rect">
+            <a:avLst/>
+          </a:prstGeom>
+          <a:noFill/>
+        </p:spPr>
+        <p:txBody>
+          <a:bodyPr wrap="none">
+            <a:spAutoFit/>
+          </a:bodyPr>
+          <a:lstStyle/>
+          <a:p>
+            <a:pPr>
+              <a:defRPr sz="1100" b="1">
+                <a:solidFill>
+                  <a:srgbClr val="DC2626"/>
+                </a:solidFill>
+              </a:defRPr>
+            </a:pPr>
+            <a:r>
+              <a:t>3. Anti-Cheating Sandbox &amp; Attempt Caps</a:t>
+            </a:r>
+          </a:p>
+        </p:txBody>
+      </p:sp>
+      <p:sp>
+        <p:nvSpPr>
+          <p:cNvPr id="15" name="TextBox 14"/>
+          <p:cNvSpPr txBox="1"/>
+          <p:nvPr/>
+        </p:nvSpPr>
+        <p:spPr>
+          <a:xfrm>
+            <a:off x="8092440" y="1691640"/>
+            <a:ext cx="3200400" cy="2971800"/>
+          </a:xfrm>
+          <a:prstGeom prst="rect">
+            <a:avLst/>
+          </a:prstGeom>
+          <a:noFill/>
+        </p:spPr>
+        <p:txBody>
+          <a:bodyPr wrap="square">
+            <a:spAutoFit/>
+          </a:bodyPr>
+          <a:lstStyle/>
+          <a:p>
+            <a:pPr>
+              <a:spcBef>
+                <a:spcPts val="300"/>
+              </a:spcBef>
+              <a:defRPr b="1" sz="850">
+                <a:solidFill>
+                  <a:srgbClr val="DC2626"/>
+                </a:solidFill>
+              </a:defRPr>
+            </a:pPr>
+            <a:r>
+              <a:t>• Strict 3-Attempt Maximum: </a:t>
+            </a:r>
+            <a:r>
+              <a:rPr b="0" sz="800">
+                <a:solidFill>
+                  <a:srgbClr val="0F172A"/>
+                </a:solidFill>
+              </a:rPr>
+              <a:t>Strict limit of 3 lifetime attempts per skill module to eliminate brute-forcing and question-memorization loopholes.</a:t>
+            </a:r>
+          </a:p>
+          <a:p>
+            <a:pPr>
+              <a:spcBef>
+                <a:spcPts val="300"/>
+              </a:spcBef>
+              <a:defRPr b="1" sz="850">
+                <a:solidFill>
+                  <a:srgbClr val="DC2626"/>
+                </a:solidFill>
+              </a:defRPr>
+            </a:pPr>
+            <a:r>
+              <a:t>• Mandatory Cooldown Period: </a:t>
+            </a:r>
+            <a:r>
+              <a:rPr b="0" sz="800">
+                <a:solidFill>
+                  <a:srgbClr val="0F172A"/>
+                </a:solidFill>
+              </a:rPr>
+              <a:t>Failed attempts trigger a mandatory 48-hour revision lockout with targeted SWAYAM/NPTEL refresher modules before retesting.</a:t>
+            </a:r>
+          </a:p>
+          <a:p>
+            <a:pPr>
+              <a:spcBef>
+                <a:spcPts val="300"/>
+              </a:spcBef>
+              <a:defRPr b="1" sz="850">
+                <a:solidFill>
+                  <a:srgbClr val="DC2626"/>
+                </a:solidFill>
+              </a:defRPr>
+            </a:pPr>
+            <a:r>
+              <a:t>• Zero-Extension Sandbox: </a:t>
+            </a:r>
+            <a:r>
+              <a:rPr b="0" sz="800">
+                <a:solidFill>
+                  <a:srgbClr val="0F172A"/>
+                </a:solidFill>
+              </a:rPr>
+              <a:t>Browser environment detects and actively blocks browser extensions (ChatGPT, Copilot, sidecar bots, inspect extensions).</a:t>
+            </a:r>
+          </a:p>
+          <a:p>
+            <a:pPr>
+              <a:spcBef>
+                <a:spcPts val="300"/>
+              </a:spcBef>
+              <a:defRPr b="1" sz="850">
+                <a:solidFill>
+                  <a:srgbClr val="DC2626"/>
+                </a:solidFill>
+              </a:defRPr>
+            </a:pPr>
+            <a:r>
+              <a:t>• System Lockdown Protocol: </a:t>
+            </a:r>
+            <a:r>
+              <a:rPr b="0" sz="800">
+                <a:solidFill>
+                  <a:srgbClr val="0F172A"/>
+                </a:solidFill>
+              </a:rPr>
+              <a:t>Enforces fullscreen, disables copy/paste clipboard APIs, blocks right-click inspection, and logs tab-switch violations.</a:t>
+            </a:r>
+          </a:p>
+        </p:txBody>
+      </p:sp>
+      <p:sp>
+        <p:nvSpPr>
+          <p:cNvPr id="16" name="Rounded Rectangle 15"/>
+          <p:cNvSpPr/>
+          <p:nvPr/>
+        </p:nvSpPr>
+        <p:spPr>
+          <a:xfrm>
+            <a:off x="731520" y="4892040"/>
+            <a:ext cx="10698480" cy="1417320"/>
+          </a:xfrm>
+          <a:prstGeom prst="roundRect">
+            <a:avLst/>
+          </a:prstGeom>
+          <a:solidFill>
+            <a:srgbClr val="EEF2FF"/>
+          </a:solidFill>
+          <a:ln w="12700">
+            <a:solidFill>
+              <a:srgbClr val="2563EB"/>
+            </a:solidFill>
+          </a:ln>
+        </p:spPr>
+        <p:style>
+          <a:lnRef idx="1">
+            <a:schemeClr val="accent1"/>
+          </a:lnRef>
+          <a:fillRef idx="3">
+            <a:schemeClr val="accent1"/>
+          </a:fillRef>
+          <a:effectRef idx="2">
+            <a:schemeClr val="accent1"/>
+          </a:effectRef>
+          <a:fontRef idx="minor">
+            <a:schemeClr val="lt1"/>
+          </a:fontRef>
+        </p:style>
+        <p:txBody>
+          <a:bodyPr rtlCol="0" anchor="ctr"/>
+          <a:lstStyle/>
+          <a:p>
+            <a:pPr algn="ctr"/>
+          </a:p>
+        </p:txBody>
+      </p:sp>
+      <p:sp>
+        <p:nvSpPr>
+          <p:cNvPr id="17" name="TextBox 16"/>
+          <p:cNvSpPr txBox="1"/>
+          <p:nvPr/>
+        </p:nvSpPr>
+        <p:spPr>
+          <a:xfrm>
+            <a:off x="868680" y="4983480"/>
+            <a:ext cx="10424160" cy="320040"/>
+          </a:xfrm>
+          <a:prstGeom prst="rect">
+            <a:avLst/>
+          </a:prstGeom>
+          <a:noFill/>
+        </p:spPr>
+        <p:txBody>
+          <a:bodyPr wrap="none">
+            <a:spAutoFit/>
+          </a:bodyPr>
+          <a:lstStyle/>
+          <a:p>
+            <a:pPr>
+              <a:defRPr sz="1100" b="1">
+                <a:solidFill>
+                  <a:srgbClr val="1E3A8A"/>
+                </a:solidFill>
+              </a:defRPr>
+            </a:pPr>
+            <a:r>
+              <a:t>4. Live LMS Roadmap Progress Tracking (SWAYAM, NPTEL &amp; Institutional Portals)</a:t>
+            </a:r>
+          </a:p>
+        </p:txBody>
+      </p:sp>
+      <p:sp>
+        <p:nvSpPr>
+          <p:cNvPr id="18" name="TextBox 17"/>
+          <p:cNvSpPr txBox="1"/>
+          <p:nvPr/>
+        </p:nvSpPr>
+        <p:spPr>
+          <a:xfrm>
+            <a:off x="868680" y="5230368"/>
+            <a:ext cx="10424160" cy="1005840"/>
+          </a:xfrm>
+          <a:prstGeom prst="rect">
+            <a:avLst/>
+          </a:prstGeom>
+          <a:noFill/>
+        </p:spPr>
+        <p:txBody>
+          <a:bodyPr wrap="square">
+            <a:spAutoFit/>
+          </a:bodyPr>
+          <a:lstStyle/>
+          <a:p>
+            <a:pPr>
+              <a:defRPr sz="850">
+                <a:solidFill>
+                  <a:srgbClr val="0F172A"/>
+                </a:solidFill>
+              </a:defRPr>
+            </a:pPr>
+            <a:r>
+              <a:t>• Seamless Educational Ingestion: Connects via LTI / REST Webhooks to SWAYAM, NPTEL, Coursera, and college LMS platforms to track student progress.</a:t>
+            </a:r>
+          </a:p>
+          <a:p>
+            <a:pPr>
+              <a:spcBef>
+                <a:spcPts val="200"/>
+              </a:spcBef>
+              <a:defRPr sz="850">
+                <a:solidFill>
+                  <a:srgbClr val="0F172A"/>
+                </a:solidFill>
+              </a:defRPr>
+            </a:pPr>
+            <a:r>
+              <a:t>• Live Roadmap Milestone Sync: Ingests video completion rates, weekly assignment submissions, and proctored exam scores in real time.</a:t>
+            </a:r>
+          </a:p>
+          <a:p>
+            <a:pPr>
+              <a:spcBef>
+                <a:spcPts val="200"/>
+              </a:spcBef>
+              <a:defRPr sz="850">
+                <a:solidFill>
+                  <a:srgbClr val="0F172A"/>
+                </a:solidFill>
+              </a:defRPr>
+            </a:pPr>
+            <a:r>
+              <a:t>• Automated Credential Pathway: Once a student completes a roadmap course, the platform automatically unlocks the proctored 10-Q verification assessment, updating the user's live role-readiness dashboard.</a:t>
+            </a:r>
+          </a:p>
+        </p:txBody>
+      </p:sp>
+    </p:spTree>
+  </p:cSld>
+  <p:clrMapOvr>
+    <a:masterClrMapping/>
+  </p:clrMapOvr>
+</p:sld>
+</file>
+
+<file path=ppt/slides/slide17.xml><?xml version="1.0" encoding="utf-8"?>
+<p:sld xmlns:a="http://schemas.openxmlformats.org/drawingml/2006/main" xmlns:p="http://schemas.openxmlformats.org/presentationml/2006/main" xmlns:r="http://schemas.openxmlformats.org/officeDocument/2006/relationships">
+  <p:cSld>
+    <p:spTree>
+      <p:nvGrpSpPr>
+        <p:cNvPr id="1" name=""/>
+        <p:cNvGrpSpPr/>
+        <p:nvPr/>
+      </p:nvGrpSpPr>
+      <p:grpSpPr/>
+      <p:sp>
+        <p:nvSpPr>
+          <p:cNvPr id="2" name="Rectangle 1"/>
+          <p:cNvSpPr/>
+          <p:nvPr/>
+        </p:nvSpPr>
+        <p:spPr>
+          <a:xfrm>
+            <a:off x="0" y="0"/>
+            <a:ext cx="12191695" cy="54864"/>
+          </a:xfrm>
+          <a:prstGeom prst="rect">
+            <a:avLst/>
+          </a:prstGeom>
+          <a:solidFill>
+            <a:srgbClr val="2563EB"/>
+          </a:solidFill>
+          <a:ln>
+            <a:noFill/>
+          </a:ln>
+        </p:spPr>
+        <p:style>
+          <a:lnRef idx="1">
+            <a:schemeClr val="accent1"/>
+          </a:lnRef>
+          <a:fillRef idx="3">
+            <a:schemeClr val="accent1"/>
+          </a:fillRef>
+          <a:effectRef idx="2">
+            <a:schemeClr val="accent1"/>
+          </a:effectRef>
+          <a:fontRef idx="minor">
+            <a:schemeClr val="lt1"/>
+          </a:fontRef>
+        </p:style>
+        <p:txBody>
+          <a:bodyPr rtlCol="0" anchor="ctr"/>
+          <a:lstStyle/>
+          <a:p>
+            <a:pPr algn="ctr"/>
+          </a:p>
+        </p:txBody>
+      </p:sp>
+      <p:sp>
+        <p:nvSpPr>
+          <p:cNvPr id="3" name="Rectangle 2"/>
+          <p:cNvSpPr/>
+          <p:nvPr/>
+        </p:nvSpPr>
+        <p:spPr>
+          <a:xfrm>
+            <a:off x="0" y="6473952"/>
+            <a:ext cx="12191695" cy="384048"/>
+          </a:xfrm>
+          <a:prstGeom prst="rect">
+            <a:avLst/>
+          </a:prstGeom>
+          <a:solidFill>
+            <a:srgbClr val="F8FAFC"/>
+          </a:solidFill>
+          <a:ln w="6350">
+            <a:solidFill>
+              <a:srgbClr val="CBD5E1"/>
+            </a:solidFill>
+          </a:ln>
+        </p:spPr>
+        <p:style>
+          <a:lnRef idx="1">
+            <a:schemeClr val="accent1"/>
+          </a:lnRef>
+          <a:fillRef idx="3">
+            <a:schemeClr val="accent1"/>
+          </a:fillRef>
+          <a:effectRef idx="2">
+            <a:schemeClr val="accent1"/>
+          </a:effectRef>
+          <a:fontRef idx="minor">
+            <a:schemeClr val="lt1"/>
+          </a:fontRef>
+        </p:style>
+        <p:txBody>
+          <a:bodyPr rtlCol="0" anchor="ctr" lIns="731520"/>
+          <a:lstStyle/>
+          <a:p>
+            <a:pPr algn="l">
+              <a:defRPr sz="850">
+                <a:solidFill>
+                  <a:srgbClr val="475569"/>
+                </a:solidFill>
+              </a:defRPr>
+            </a:pPr>
+            <a:r>
+              <a:t>CareerPath AI  |  SAS &amp; CU Hackathon  ·  Round 2 Technical Evaluation  |  Build For Bharat 2.0</a:t>
+            </a:r>
+          </a:p>
+        </p:txBody>
+      </p:sp>
+      <p:sp>
+        <p:nvSpPr>
+          <p:cNvPr id="4" name="TextBox 3"/>
+          <p:cNvSpPr txBox="1"/>
+          <p:nvPr/>
+        </p:nvSpPr>
+        <p:spPr>
+          <a:xfrm>
+            <a:off x="10789920" y="6492240"/>
+            <a:ext cx="1097280" cy="320040"/>
+          </a:xfrm>
+          <a:prstGeom prst="rect">
+            <a:avLst/>
+          </a:prstGeom>
+          <a:noFill/>
+        </p:spPr>
+        <p:txBody>
+          <a:bodyPr wrap="none">
+            <a:spAutoFit/>
+          </a:bodyPr>
+          <a:lstStyle/>
+          <a:p>
+            <a:pPr algn="r">
+              <a:defRPr sz="850" b="1">
+                <a:solidFill>
+                  <a:srgbClr val="475569"/>
+                </a:solidFill>
+              </a:defRPr>
+            </a:pPr>
+            <a:r>
+              <a:t>17 / 18</a:t>
+            </a:r>
+          </a:p>
+        </p:txBody>
+      </p:sp>
+      <p:sp>
+        <p:nvSpPr>
+          <p:cNvPr id="5" name="Rounded Rectangle 4"/>
+          <p:cNvSpPr/>
+          <p:nvPr/>
+        </p:nvSpPr>
+        <p:spPr>
+          <a:xfrm>
+            <a:off x="731520" y="201168"/>
+            <a:ext cx="3474720" cy="292608"/>
+          </a:xfrm>
+          <a:prstGeom prst="roundRect">
+            <a:avLst/>
+          </a:prstGeom>
+          <a:solidFill>
+            <a:srgbClr val="EEF2FF"/>
+          </a:solidFill>
+          <a:ln w="12700">
+            <a:solidFill>
+              <a:srgbClr val="818CF8"/>
+            </a:solidFill>
+          </a:ln>
+        </p:spPr>
+        <p:style>
+          <a:lnRef idx="1">
+            <a:schemeClr val="accent1"/>
+          </a:lnRef>
+          <a:fillRef idx="3">
+            <a:schemeClr val="accent1"/>
+          </a:fillRef>
+          <a:effectRef idx="2">
+            <a:schemeClr val="accent1"/>
+          </a:effectRef>
+          <a:fontRef idx="minor">
+            <a:schemeClr val="lt1"/>
+          </a:fontRef>
+        </p:style>
+        <p:txBody>
+          <a:bodyPr rtlCol="0" anchor="ctr"/>
+          <a:lstStyle/>
+          <a:p>
+            <a:pPr algn="ctr">
+              <a:defRPr sz="950" b="1">
+                <a:solidFill>
+                  <a:srgbClr val="3730A3"/>
+                </a:solidFill>
+              </a:defRPr>
+            </a:pPr>
+            <a:r>
+              <a:t>★ Jury Advisory · Future Implementation (Part 2)</a:t>
+            </a:r>
+          </a:p>
+        </p:txBody>
+      </p:sp>
+      <p:sp>
+        <p:nvSpPr>
+          <p:cNvPr id="6" name="TextBox 5"/>
+          <p:cNvSpPr txBox="1"/>
+          <p:nvPr/>
+        </p:nvSpPr>
+        <p:spPr>
+          <a:xfrm>
+            <a:off x="731520" y="548640"/>
+            <a:ext cx="10698480" cy="731520"/>
+          </a:xfrm>
+          <a:prstGeom prst="rect">
+            <a:avLst/>
+          </a:prstGeom>
+          <a:noFill/>
+        </p:spPr>
+        <p:txBody>
+          <a:bodyPr wrap="square">
+            <a:spAutoFit/>
+          </a:bodyPr>
+          <a:lstStyle/>
+          <a:p>
+            <a:pPr>
+              <a:defRPr sz="2200" b="1">
+                <a:solidFill>
+                  <a:srgbClr val="1E3A8A"/>
+                </a:solidFill>
+              </a:defRPr>
+            </a:pPr>
+            <a:r>
+              <a:t>Future Implementation: Dynamic Resume Generation &amp; AI Interview Simulator</a:t>
+            </a:r>
+          </a:p>
+          <a:p>
+            <a:pPr>
+              <a:spcBef>
+                <a:spcPts val="200"/>
+              </a:spcBef>
+              <a:defRPr sz="1100">
+                <a:solidFill>
+                  <a:srgbClr val="475569"/>
+                </a:solidFill>
+              </a:defRPr>
+            </a:pPr>
+            <a:r>
+              <a:t>Addressing Top-30 Jury Advisory: Automated resume recompilation with verifiable credentials and conversational multimodal technical viva.</a:t>
+            </a:r>
+          </a:p>
+        </p:txBody>
+      </p:sp>
+      <p:sp>
+        <p:nvSpPr>
+          <p:cNvPr id="7" name="Rounded Rectangle 6"/>
+          <p:cNvSpPr/>
+          <p:nvPr/>
+        </p:nvSpPr>
+        <p:spPr>
+          <a:xfrm>
+            <a:off x="731520" y="1280160"/>
+            <a:ext cx="5212080" cy="3703320"/>
+          </a:xfrm>
+          <a:prstGeom prst="roundRect">
+            <a:avLst/>
+          </a:prstGeom>
+          <a:solidFill>
+            <a:srgbClr val="FFFFFF"/>
+          </a:solidFill>
+          <a:ln w="12700">
+            <a:solidFill>
+              <a:srgbClr val="059669"/>
+            </a:solidFill>
+          </a:ln>
+        </p:spPr>
+        <p:style>
+          <a:lnRef idx="1">
+            <a:schemeClr val="accent1"/>
+          </a:lnRef>
+          <a:fillRef idx="3">
+            <a:schemeClr val="accent1"/>
+          </a:fillRef>
+          <a:effectRef idx="2">
+            <a:schemeClr val="accent1"/>
+          </a:effectRef>
+          <a:fontRef idx="minor">
+            <a:schemeClr val="lt1"/>
+          </a:fontRef>
+        </p:style>
+        <p:txBody>
+          <a:bodyPr rtlCol="0" anchor="ctr"/>
+          <a:lstStyle/>
+          <a:p>
+            <a:pPr algn="ctr"/>
+          </a:p>
+        </p:txBody>
+      </p:sp>
+      <p:sp>
+        <p:nvSpPr>
+          <p:cNvPr id="8" name="TextBox 7"/>
+          <p:cNvSpPr txBox="1"/>
+          <p:nvPr/>
+        </p:nvSpPr>
+        <p:spPr>
+          <a:xfrm>
+            <a:off x="868680" y="1371600"/>
+            <a:ext cx="4937760" cy="320040"/>
+          </a:xfrm>
+          <a:prstGeom prst="rect">
+            <a:avLst/>
+          </a:prstGeom>
+          <a:noFill/>
+        </p:spPr>
+        <p:txBody>
+          <a:bodyPr wrap="none">
+            <a:spAutoFit/>
+          </a:bodyPr>
+          <a:lstStyle/>
+          <a:p>
+            <a:pPr>
+              <a:defRPr sz="1100" b="1">
+                <a:solidFill>
+                  <a:srgbClr val="059669"/>
+                </a:solidFill>
+              </a:defRPr>
+            </a:pPr>
+            <a:r>
+              <a:t>Dynamic Auto-Updated Resume Generator (1-Click Download)</a:t>
+            </a:r>
+          </a:p>
+        </p:txBody>
+      </p:sp>
+      <p:sp>
+        <p:nvSpPr>
+          <p:cNvPr id="9" name="TextBox 8"/>
+          <p:cNvSpPr txBox="1"/>
+          <p:nvPr/>
+        </p:nvSpPr>
+        <p:spPr>
+          <a:xfrm>
+            <a:off x="868680" y="1691640"/>
+            <a:ext cx="4937760" cy="3200400"/>
+          </a:xfrm>
+          <a:prstGeom prst="rect">
+            <a:avLst/>
+          </a:prstGeom>
+          <a:noFill/>
+        </p:spPr>
+        <p:txBody>
+          <a:bodyPr wrap="square">
+            <a:spAutoFit/>
+          </a:bodyPr>
+          <a:lstStyle/>
+          <a:p>
+            <a:pPr>
+              <a:spcBef>
+                <a:spcPts val="300"/>
+              </a:spcBef>
+              <a:defRPr b="1" sz="850">
+                <a:solidFill>
+                  <a:srgbClr val="059669"/>
+                </a:solidFill>
+              </a:defRPr>
+            </a:pPr>
+            <a:r>
+              <a:t>• Automated Resume Recompilation: </a:t>
+            </a:r>
+            <a:r>
+              <a:rPr b="0" sz="800">
+                <a:solidFill>
+                  <a:srgbClr val="0F172A"/>
+                </a:solidFill>
+              </a:rPr>
+              <a:t>The moment a candidate passes a 10-Q assessment (≥7-8/10) or completes a verified roadmap course, CareerPath AI automatically rebuilds their master resume.</a:t>
+            </a:r>
+          </a:p>
+          <a:p>
+            <a:pPr>
+              <a:spcBef>
+                <a:spcPts val="300"/>
+              </a:spcBef>
+              <a:defRPr b="1" sz="850">
+                <a:solidFill>
+                  <a:srgbClr val="059669"/>
+                </a:solidFill>
+              </a:defRPr>
+            </a:pPr>
+            <a:r>
+              <a:t>• ATS-Optimized Formatting: </a:t>
+            </a:r>
+            <a:r>
+              <a:rPr b="0" sz="800">
+                <a:solidFill>
+                  <a:srgbClr val="0F172A"/>
+                </a:solidFill>
+              </a:rPr>
+              <a:t>Re-synthesizes candidate experience into industry-standard single-column ATS layouts, optimizing keyword density and machine readability.</a:t>
+            </a:r>
+          </a:p>
+          <a:p>
+            <a:pPr>
+              <a:spcBef>
+                <a:spcPts val="300"/>
+              </a:spcBef>
+              <a:defRPr b="1" sz="850">
+                <a:solidFill>
+                  <a:srgbClr val="059669"/>
+                </a:solidFill>
+              </a:defRPr>
+            </a:pPr>
+            <a:r>
+              <a:t>• Verified Badge Injection: </a:t>
+            </a:r>
+            <a:r>
+              <a:rPr b="0" sz="800">
+                <a:solidFill>
+                  <a:srgbClr val="0F172A"/>
+                </a:solidFill>
+              </a:rPr>
+              <a:t>Embeds authenticated competency tags ('Verified: React 80%', 'Certified: NPTEL Data Structures') while deprioritizing unverified claims.</a:t>
+            </a:r>
+          </a:p>
+          <a:p>
+            <a:pPr>
+              <a:spcBef>
+                <a:spcPts val="300"/>
+              </a:spcBef>
+              <a:defRPr b="1" sz="850">
+                <a:solidFill>
+                  <a:srgbClr val="059669"/>
+                </a:solidFill>
+              </a:defRPr>
+            </a:pPr>
+            <a:r>
+              <a:t>• Cryptographic QR Verification: </a:t>
+            </a:r>
+            <a:r>
+              <a:rPr b="0" sz="800">
+                <a:solidFill>
+                  <a:srgbClr val="0F172A"/>
+                </a:solidFill>
+              </a:rPr>
+              <a:t>Embeds a tamper-proof QR code linking hiring managers directly to the candidate's verified live skill audit ledger on CareerPath AI.</a:t>
+            </a:r>
+          </a:p>
+          <a:p>
+            <a:pPr>
+              <a:spcBef>
+                <a:spcPts val="300"/>
+              </a:spcBef>
+              <a:defRPr b="1" sz="850">
+                <a:solidFill>
+                  <a:srgbClr val="059669"/>
+                </a:solidFill>
+              </a:defRPr>
+            </a:pPr>
+            <a:r>
+              <a:t>• Instant Multi-Format Export: </a:t>
+            </a:r>
+            <a:r>
+              <a:rPr b="0" sz="800">
+                <a:solidFill>
+                  <a:srgbClr val="0F172A"/>
+                </a:solidFill>
+              </a:rPr>
+              <a:t>Provides 1-click download options in ATS-compliant vector PDF and fully editable Microsoft Word DOCX formats.</a:t>
+            </a:r>
+          </a:p>
+        </p:txBody>
+      </p:sp>
+      <p:sp>
+        <p:nvSpPr>
+          <p:cNvPr id="10" name="Rounded Rectangle 9"/>
+          <p:cNvSpPr/>
+          <p:nvPr/>
+        </p:nvSpPr>
+        <p:spPr>
+          <a:xfrm>
+            <a:off x="6217920" y="1280160"/>
+            <a:ext cx="5212080" cy="3703320"/>
+          </a:xfrm>
+          <a:prstGeom prst="roundRect">
+            <a:avLst/>
+          </a:prstGeom>
+          <a:solidFill>
+            <a:srgbClr val="FFFFFF"/>
+          </a:solidFill>
+          <a:ln w="12700">
+            <a:solidFill>
+              <a:srgbClr val="1E3A8A"/>
+            </a:solidFill>
+          </a:ln>
+        </p:spPr>
+        <p:style>
+          <a:lnRef idx="1">
+            <a:schemeClr val="accent1"/>
+          </a:lnRef>
+          <a:fillRef idx="3">
+            <a:schemeClr val="accent1"/>
+          </a:fillRef>
+          <a:effectRef idx="2">
+            <a:schemeClr val="accent1"/>
+          </a:effectRef>
+          <a:fontRef idx="minor">
+            <a:schemeClr val="lt1"/>
+          </a:fontRef>
+        </p:style>
+        <p:txBody>
+          <a:bodyPr rtlCol="0" anchor="ctr"/>
+          <a:lstStyle/>
+          <a:p>
+            <a:pPr algn="ctr"/>
+          </a:p>
+        </p:txBody>
+      </p:sp>
+      <p:sp>
+        <p:nvSpPr>
+          <p:cNvPr id="11" name="TextBox 10"/>
+          <p:cNvSpPr txBox="1"/>
+          <p:nvPr/>
+        </p:nvSpPr>
+        <p:spPr>
+          <a:xfrm>
+            <a:off x="6355080" y="1371600"/>
+            <a:ext cx="4937760" cy="320040"/>
+          </a:xfrm>
+          <a:prstGeom prst="rect">
+            <a:avLst/>
+          </a:prstGeom>
+          <a:noFill/>
+        </p:spPr>
+        <p:txBody>
+          <a:bodyPr wrap="none">
+            <a:spAutoFit/>
+          </a:bodyPr>
+          <a:lstStyle/>
+          <a:p>
+            <a:pPr>
+              <a:defRPr sz="1100" b="1">
+                <a:solidFill>
+                  <a:srgbClr val="1E3A8A"/>
+                </a:solidFill>
+              </a:defRPr>
+            </a:pPr>
+            <a:r>
+              <a:t>Conversational AI Mock Interview &amp; Technical Viva Simulator</a:t>
+            </a:r>
+          </a:p>
+        </p:txBody>
+      </p:sp>
+      <p:sp>
+        <p:nvSpPr>
+          <p:cNvPr id="12" name="TextBox 11"/>
+          <p:cNvSpPr txBox="1"/>
+          <p:nvPr/>
+        </p:nvSpPr>
+        <p:spPr>
+          <a:xfrm>
+            <a:off x="6355080" y="1691640"/>
+            <a:ext cx="4937760" cy="3200400"/>
+          </a:xfrm>
+          <a:prstGeom prst="rect">
+            <a:avLst/>
+          </a:prstGeom>
+          <a:noFill/>
+        </p:spPr>
+        <p:txBody>
+          <a:bodyPr wrap="square">
+            <a:spAutoFit/>
+          </a:bodyPr>
+          <a:lstStyle/>
+          <a:p>
+            <a:pPr>
+              <a:spcBef>
+                <a:spcPts val="300"/>
+              </a:spcBef>
+              <a:defRPr b="1" sz="850">
+                <a:solidFill>
+                  <a:srgbClr val="1E3A8A"/>
+                </a:solidFill>
+              </a:defRPr>
+            </a:pPr>
+            <a:r>
+              <a:t>• Role-Specific Interview Persona: </a:t>
+            </a:r>
+            <a:r>
+              <a:rPr b="0" sz="800">
+                <a:solidFill>
+                  <a:srgbClr val="0F172A"/>
+                </a:solidFill>
+              </a:rPr>
+              <a:t>Tailored AI interviewer adapting dynamically to target roles (e.g. Senior Backend Engineer vs Associate Data Analyst).</a:t>
+            </a:r>
+          </a:p>
+          <a:p>
+            <a:pPr>
+              <a:spcBef>
+                <a:spcPts val="300"/>
+              </a:spcBef>
+              <a:defRPr b="1" sz="850">
+                <a:solidFill>
+                  <a:srgbClr val="1E3A8A"/>
+                </a:solidFill>
+              </a:defRPr>
+            </a:pPr>
+            <a:r>
+              <a:t>• Project-Grounded Viva Questions: </a:t>
+            </a:r>
+            <a:r>
+              <a:rPr b="0" sz="800">
+                <a:solidFill>
+                  <a:srgbClr val="0F172A"/>
+                </a:solidFill>
+              </a:rPr>
+              <a:t>Analyzes the candidate's verified skills and resume projects to ask probing technical viva questions ('Walk me through your database indexing strategy in Project X').</a:t>
+            </a:r>
+          </a:p>
+          <a:p>
+            <a:pPr>
+              <a:spcBef>
+                <a:spcPts val="300"/>
+              </a:spcBef>
+              <a:defRPr b="1" sz="850">
+                <a:solidFill>
+                  <a:srgbClr val="1E3A8A"/>
+                </a:solidFill>
+              </a:defRPr>
+            </a:pPr>
+            <a:r>
+              <a:t>• Adaptive Counter-Probing: </a:t>
+            </a:r>
+            <a:r>
+              <a:rPr b="0" sz="800">
+                <a:solidFill>
+                  <a:srgbClr val="0F172A"/>
+                </a:solidFill>
+              </a:rPr>
+              <a:t>Dynamically challenges superficial answers with architectural edge cases ('What happens if your cache invalidation fails under high load?').</a:t>
+            </a:r>
+          </a:p>
+          <a:p>
+            <a:pPr>
+              <a:spcBef>
+                <a:spcPts val="300"/>
+              </a:spcBef>
+              <a:defRPr b="1" sz="850">
+                <a:solidFill>
+                  <a:srgbClr val="1E3A8A"/>
+                </a:solidFill>
+              </a:defRPr>
+            </a:pPr>
+            <a:r>
+              <a:t>• Multimodal 4-D Scoring Rubric: </a:t>
+            </a:r>
+            <a:r>
+              <a:rPr b="0" sz="800">
+                <a:solidFill>
+                  <a:srgbClr val="0F172A"/>
+                </a:solidFill>
+              </a:rPr>
+              <a:t>Evaluates candidate responses across 4 dimensions: (1) Technical Correctness, (2) Problem-Solving Structure, (3) Communication Clarity, and (4) Speech Delivery.</a:t>
+            </a:r>
+          </a:p>
+          <a:p>
+            <a:pPr>
+              <a:spcBef>
+                <a:spcPts val="300"/>
+              </a:spcBef>
+              <a:defRPr b="1" sz="850">
+                <a:solidFill>
+                  <a:srgbClr val="1E3A8A"/>
+                </a:solidFill>
+              </a:defRPr>
+            </a:pPr>
+            <a:r>
+              <a:t>• Actionable Post-Viva Diagnostics: </a:t>
+            </a:r>
+            <a:r>
+              <a:rPr b="0" sz="800">
+                <a:solidFill>
+                  <a:srgbClr val="0F172A"/>
+                </a:solidFill>
+              </a:rPr>
+              <a:t>Generates an instant feedback report highlighting strong answers, conceptual blindspots, and personalized roadmap study links.</a:t>
+            </a:r>
+          </a:p>
+        </p:txBody>
+      </p:sp>
+      <p:sp>
+        <p:nvSpPr>
+          <p:cNvPr id="13" name="Rounded Rectangle 12"/>
+          <p:cNvSpPr/>
+          <p:nvPr/>
+        </p:nvSpPr>
+        <p:spPr>
+          <a:xfrm>
+            <a:off x="731520" y="5120640"/>
+            <a:ext cx="10698480" cy="1188720"/>
+          </a:xfrm>
+          <a:prstGeom prst="roundRect">
+            <a:avLst/>
+          </a:prstGeom>
+          <a:solidFill>
+            <a:srgbClr val="0F172A"/>
+          </a:solidFill>
+          <a:ln w="12700">
+            <a:solidFill>
+              <a:srgbClr val="2563EB"/>
+            </a:solidFill>
+          </a:ln>
+        </p:spPr>
+        <p:style>
+          <a:lnRef idx="1">
+            <a:schemeClr val="accent1"/>
+          </a:lnRef>
+          <a:fillRef idx="3">
+            <a:schemeClr val="accent1"/>
+          </a:fillRef>
+          <a:effectRef idx="2">
+            <a:schemeClr val="accent1"/>
+          </a:effectRef>
+          <a:fontRef idx="minor">
+            <a:schemeClr val="lt1"/>
+          </a:fontRef>
+        </p:style>
+        <p:txBody>
+          <a:bodyPr rtlCol="0" anchor="ctr"/>
+          <a:lstStyle/>
+          <a:p>
+            <a:pPr algn="ctr"/>
+          </a:p>
+        </p:txBody>
+      </p:sp>
+      <p:sp>
+        <p:nvSpPr>
+          <p:cNvPr id="14" name="TextBox 13"/>
+          <p:cNvSpPr txBox="1"/>
+          <p:nvPr/>
+        </p:nvSpPr>
+        <p:spPr>
+          <a:xfrm>
+            <a:off x="868680" y="5166360"/>
+            <a:ext cx="10424160" cy="1097280"/>
+          </a:xfrm>
+          <a:prstGeom prst="rect">
+            <a:avLst/>
+          </a:prstGeom>
+          <a:noFill/>
+        </p:spPr>
+        <p:txBody>
+          <a:bodyPr wrap="square">
+            <a:spAutoFit/>
+          </a:bodyPr>
+          <a:lstStyle/>
+          <a:p>
+            <a:pPr>
+              <a:defRPr b="1" sz="1000">
+                <a:solidFill>
+                  <a:srgbClr val="38BDF8"/>
+                </a:solidFill>
+              </a:defRPr>
+            </a:pPr>
+            <a:r>
+              <a:t>★ End-to-End Closed-Loop Talent Lifecycle (Future Architecture):</a:t>
+            </a:r>
+          </a:p>
+          <a:p>
+            <a:pPr>
+              <a:spcBef>
+                <a:spcPts val="400"/>
+              </a:spcBef>
+              <a:defRPr sz="850">
+                <a:solidFill>
+                  <a:srgbClr val="CBD5E1"/>
+                </a:solidFill>
+              </a:defRPr>
+            </a:pPr>
+            <a:r>
+              <a:t>Resume Parsing &amp; Gap Audit  ➔  Live LMS Progress Sync (SWAYAM / NPTEL)  ➔  Proctored 10-Q Micro-Assessments (70-80% pass bar, max 3 attempts, anti-cheat sandbox)  ➔  Dynamic Auto-Recompiled Resume (PDF/DOCX + QR Verification)  ➔  Conversational AI Technical Viva  ➔  Pre-Screened Placement Handoff.</a:t>
+            </a:r>
+          </a:p>
+        </p:txBody>
+      </p:sp>
+    </p:spTree>
+  </p:cSld>
+  <p:clrMapOvr>
+    <a:masterClrMapping/>
+  </p:clrMapOvr>
+</p:sld>
+</file>
+
+<file path=ppt/slides/slide18.xml><?xml version="1.0" encoding="utf-8"?>
+<p:sld xmlns:a="http://schemas.openxmlformats.org/drawingml/2006/main" xmlns:p="http://schemas.openxmlformats.org/presentationml/2006/main" xmlns:r="http://schemas.openxmlformats.org/officeDocument/2006/relationships">
+  <p:cSld>
+    <p:spTree>
+      <p:nvGrpSpPr>
+        <p:cNvPr id="1" name=""/>
+        <p:cNvGrpSpPr/>
+        <p:nvPr/>
+      </p:nvGrpSpPr>
+      <p:grpSpPr/>
+      <p:sp>
+        <p:nvSpPr>
+          <p:cNvPr id="2" name="Rectangle 1"/>
+          <p:cNvSpPr/>
+          <p:nvPr/>
+        </p:nvSpPr>
+        <p:spPr>
+          <a:xfrm>
+            <a:off x="0" y="0"/>
             <a:ext cx="12191695" cy="6858000"/>
           </a:xfrm>
           <a:prstGeom prst="rect">
@@ -10331,7 +12102,7 @@
               </a:defRPr>
             </a:pPr>
             <a:r>
-              <a:t>Production Tech Stack:</a:t>
+              <a:t>Production Tech Stack &amp; Future Capabilities:</a:t>
             </a:r>
           </a:p>
           <a:p>
@@ -10346,7 +12117,7 @@
               </a:defRPr>
             </a:pPr>
             <a:r>
-              <a:t>FastAPI 0.115  ·  Python 3.12  ·  React 18 + Vite  ·  TailwindCSS  ·  NumPy &amp; SciPy (Closed-Form)  ·  RapidFuzz  ·  PyMuPDF  ·  ReportLab  ·  Supabase</a:t>
+              <a:t>FastAPI 0.115  ·  Python 3.12  ·  React 18 + Vite  ·  TailwindCSS  ·  NumPy &amp; SciPy (Closed-Form)  ·  RapidFuzz  ·  PyMuPDF  ·  ReportLab  ·  Supabase  ·  WebRTC Viva</a:t>
             </a:r>
           </a:p>
         </p:txBody>
@@ -10496,7 +12267,7 @@
               </a:defRPr>
             </a:pPr>
             <a:r>
-              <a:t>02 / 16</a:t>
+              <a:t>02 / 18</a:t>
             </a:r>
           </a:p>
         </p:txBody>
@@ -10614,8 +12385,8 @@
           <p:nvPr/>
         </p:nvGraphicFramePr>
         <p:xfrm>
-          <a:off x="731520" y="1371600"/>
-          <a:ext cx="10698480" cy="4663440"/>
+          <a:off x="731520" y="1280160"/>
+          <a:ext cx="10698480" cy="4892040"/>
         </p:xfrm>
         <a:graphic>
           <a:graphicData uri="http://schemas.openxmlformats.org/drawingml/2006/table">
@@ -10629,14 +12400,14 @@
                 <a:gridCol w="1005840"/>
                 <a:gridCol w="6400800"/>
               </a:tblGrid>
-              <a:tr h="666205">
-                <a:tc>
-                  <a:txBody>
-                    <a:bodyPr/>
-                    <a:lstStyle/>
-                    <a:p>
-                      <a:pPr>
-                        <a:defRPr sz="1050" b="1">
+              <a:tr h="611505">
+                <a:tc>
+                  <a:txBody>
+                    <a:bodyPr/>
+                    <a:lstStyle/>
+                    <a:p>
+                      <a:pPr>
+                        <a:defRPr sz="1000" b="1">
                           <a:solidFill>
                             <a:srgbClr val="FFFFFF"/>
                           </a:solidFill>
@@ -10659,7 +12430,7 @@
                     <a:lstStyle/>
                     <a:p>
                       <a:pPr>
-                        <a:defRPr sz="1050" b="1">
+                        <a:defRPr sz="1000" b="1">
                           <a:solidFill>
                             <a:srgbClr val="FFFFFF"/>
                           </a:solidFill>
@@ -10682,7 +12453,7 @@
                     <a:lstStyle/>
                     <a:p>
                       <a:pPr>
-                        <a:defRPr sz="1050" b="1">
+                        <a:defRPr sz="1000" b="1">
                           <a:solidFill>
                             <a:srgbClr val="FFFFFF"/>
                           </a:solidFill>
@@ -10705,7 +12476,7 @@
                     <a:lstStyle/>
                     <a:p>
                       <a:pPr>
-                        <a:defRPr sz="1050" b="1">
+                        <a:defRPr sz="1000" b="1">
                           <a:solidFill>
                             <a:srgbClr val="FFFFFF"/>
                           </a:solidFill>
@@ -10723,14 +12494,14 @@
                   </a:tcPr>
                 </a:tc>
               </a:tr>
-              <a:tr h="666205">
-                <a:tc>
-                  <a:txBody>
-                    <a:bodyPr/>
-                    <a:lstStyle/>
-                    <a:p>
-                      <a:pPr>
-                        <a:defRPr sz="950">
+              <a:tr h="611505">
+                <a:tc>
+                  <a:txBody>
+                    <a:bodyPr/>
+                    <a:lstStyle/>
+                    <a:p>
+                      <a:pPr>
+                        <a:defRPr sz="850">
                           <a:solidFill>
                             <a:srgbClr val="0F172A"/>
                           </a:solidFill>
@@ -10753,7 +12524,7 @@
                     <a:lstStyle/>
                     <a:p>
                       <a:pPr>
-                        <a:defRPr sz="950" b="1">
+                        <a:defRPr sz="850" b="1">
                           <a:solidFill>
                             <a:srgbClr val="D97706"/>
                           </a:solidFill>
@@ -10776,7 +12547,7 @@
                     <a:lstStyle/>
                     <a:p>
                       <a:pPr>
-                        <a:defRPr sz="950" b="1">
+                        <a:defRPr sz="850" b="1">
                           <a:solidFill>
                             <a:srgbClr val="2563EB"/>
                           </a:solidFill>
@@ -10799,7 +12570,7 @@
                     <a:lstStyle/>
                     <a:p>
                       <a:pPr>
-                        <a:defRPr sz="950">
+                        <a:defRPr sz="850">
                           <a:solidFill>
                             <a:srgbClr val="0F172A"/>
                           </a:solidFill>
@@ -10817,14 +12588,14 @@
                   </a:tcPr>
                 </a:tc>
               </a:tr>
-              <a:tr h="666205">
-                <a:tc>
-                  <a:txBody>
-                    <a:bodyPr/>
-                    <a:lstStyle/>
-                    <a:p>
-                      <a:pPr>
-                        <a:defRPr sz="950">
+              <a:tr h="611505">
+                <a:tc>
+                  <a:txBody>
+                    <a:bodyPr/>
+                    <a:lstStyle/>
+                    <a:p>
+                      <a:pPr>
+                        <a:defRPr sz="850">
                           <a:solidFill>
                             <a:srgbClr val="0F172A"/>
                           </a:solidFill>
@@ -10847,7 +12618,7 @@
                     <a:lstStyle/>
                     <a:p>
                       <a:pPr>
-                        <a:defRPr sz="950" b="1">
+                        <a:defRPr sz="850" b="1">
                           <a:solidFill>
                             <a:srgbClr val="D97706"/>
                           </a:solidFill>
@@ -10870,7 +12641,7 @@
                     <a:lstStyle/>
                     <a:p>
                       <a:pPr>
-                        <a:defRPr sz="950" b="1">
+                        <a:defRPr sz="850" b="1">
                           <a:solidFill>
                             <a:srgbClr val="2563EB"/>
                           </a:solidFill>
@@ -10893,7 +12664,7 @@
                     <a:lstStyle/>
                     <a:p>
                       <a:pPr>
-                        <a:defRPr sz="950">
+                        <a:defRPr sz="850">
                           <a:solidFill>
                             <a:srgbClr val="0F172A"/>
                           </a:solidFill>
@@ -10911,14 +12682,14 @@
                   </a:tcPr>
                 </a:tc>
               </a:tr>
-              <a:tr h="666205">
-                <a:tc>
-                  <a:txBody>
-                    <a:bodyPr/>
-                    <a:lstStyle/>
-                    <a:p>
-                      <a:pPr>
-                        <a:defRPr sz="950">
+              <a:tr h="611505">
+                <a:tc>
+                  <a:txBody>
+                    <a:bodyPr/>
+                    <a:lstStyle/>
+                    <a:p>
+                      <a:pPr>
+                        <a:defRPr sz="850">
                           <a:solidFill>
                             <a:srgbClr val="0F172A"/>
                           </a:solidFill>
@@ -10941,7 +12712,7 @@
                     <a:lstStyle/>
                     <a:p>
                       <a:pPr>
-                        <a:defRPr sz="950" b="1">
+                        <a:defRPr sz="850" b="1">
                           <a:solidFill>
                             <a:srgbClr val="D97706"/>
                           </a:solidFill>
@@ -10964,7 +12735,7 @@
                     <a:lstStyle/>
                     <a:p>
                       <a:pPr>
-                        <a:defRPr sz="950" b="1">
+                        <a:defRPr sz="850" b="1">
                           <a:solidFill>
                             <a:srgbClr val="2563EB"/>
                           </a:solidFill>
@@ -10987,7 +12758,7 @@
                     <a:lstStyle/>
                     <a:p>
                       <a:pPr>
-                        <a:defRPr sz="950">
+                        <a:defRPr sz="850">
                           <a:solidFill>
                             <a:srgbClr val="0F172A"/>
                           </a:solidFill>
@@ -11005,14 +12776,14 @@
                   </a:tcPr>
                 </a:tc>
               </a:tr>
-              <a:tr h="666205">
-                <a:tc>
-                  <a:txBody>
-                    <a:bodyPr/>
-                    <a:lstStyle/>
-                    <a:p>
-                      <a:pPr>
-                        <a:defRPr sz="950">
+              <a:tr h="611505">
+                <a:tc>
+                  <a:txBody>
+                    <a:bodyPr/>
+                    <a:lstStyle/>
+                    <a:p>
+                      <a:pPr>
+                        <a:defRPr sz="850">
                           <a:solidFill>
                             <a:srgbClr val="0F172A"/>
                           </a:solidFill>
@@ -11035,7 +12806,7 @@
                     <a:lstStyle/>
                     <a:p>
                       <a:pPr>
-                        <a:defRPr sz="950" b="1">
+                        <a:defRPr sz="850" b="1">
                           <a:solidFill>
                             <a:srgbClr val="D97706"/>
                           </a:solidFill>
@@ -11058,7 +12829,7 @@
                     <a:lstStyle/>
                     <a:p>
                       <a:pPr>
-                        <a:defRPr sz="950" b="1">
+                        <a:defRPr sz="850" b="1">
                           <a:solidFill>
                             <a:srgbClr val="2563EB"/>
                           </a:solidFill>
@@ -11081,7 +12852,7 @@
                     <a:lstStyle/>
                     <a:p>
                       <a:pPr>
-                        <a:defRPr sz="950">
+                        <a:defRPr sz="850">
                           <a:solidFill>
                             <a:srgbClr val="0F172A"/>
                           </a:solidFill>
@@ -11099,14 +12870,14 @@
                   </a:tcPr>
                 </a:tc>
               </a:tr>
-              <a:tr h="666205">
-                <a:tc>
-                  <a:txBody>
-                    <a:bodyPr/>
-                    <a:lstStyle/>
-                    <a:p>
-                      <a:pPr>
-                        <a:defRPr sz="950">
+              <a:tr h="611505">
+                <a:tc>
+                  <a:txBody>
+                    <a:bodyPr/>
+                    <a:lstStyle/>
+                    <a:p>
+                      <a:pPr>
+                        <a:defRPr sz="850">
                           <a:solidFill>
                             <a:srgbClr val="0F172A"/>
                           </a:solidFill>
@@ -11129,7 +12900,7 @@
                     <a:lstStyle/>
                     <a:p>
                       <a:pPr>
-                        <a:defRPr sz="950" b="1">
+                        <a:defRPr sz="850" b="1">
                           <a:solidFill>
                             <a:srgbClr val="D97706"/>
                           </a:solidFill>
@@ -11152,7 +12923,7 @@
                     <a:lstStyle/>
                     <a:p>
                       <a:pPr>
-                        <a:defRPr sz="950" b="1">
+                        <a:defRPr sz="850" b="1">
                           <a:solidFill>
                             <a:srgbClr val="2563EB"/>
                           </a:solidFill>
@@ -11175,7 +12946,7 @@
                     <a:lstStyle/>
                     <a:p>
                       <a:pPr>
-                        <a:defRPr sz="950">
+                        <a:defRPr sz="850">
                           <a:solidFill>
                             <a:srgbClr val="0F172A"/>
                           </a:solidFill>
@@ -11193,14 +12964,14 @@
                   </a:tcPr>
                 </a:tc>
               </a:tr>
-              <a:tr h="666210">
-                <a:tc>
-                  <a:txBody>
-                    <a:bodyPr/>
-                    <a:lstStyle/>
-                    <a:p>
-                      <a:pPr>
-                        <a:defRPr sz="950">
+              <a:tr h="611505">
+                <a:tc>
+                  <a:txBody>
+                    <a:bodyPr/>
+                    <a:lstStyle/>
+                    <a:p>
+                      <a:pPr>
+                        <a:defRPr sz="850">
                           <a:solidFill>
                             <a:srgbClr val="0F172A"/>
                           </a:solidFill>
@@ -11223,7 +12994,7 @@
                     <a:lstStyle/>
                     <a:p>
                       <a:pPr>
-                        <a:defRPr sz="950" b="1">
+                        <a:defRPr sz="850" b="1">
                           <a:solidFill>
                             <a:srgbClr val="D97706"/>
                           </a:solidFill>
@@ -11246,7 +13017,7 @@
                     <a:lstStyle/>
                     <a:p>
                       <a:pPr>
-                        <a:defRPr sz="950" b="1">
+                        <a:defRPr sz="850" b="1">
                           <a:solidFill>
                             <a:srgbClr val="2563EB"/>
                           </a:solidFill>
@@ -11269,7 +13040,7 @@
                     <a:lstStyle/>
                     <a:p>
                       <a:pPr>
-                        <a:defRPr sz="950">
+                        <a:defRPr sz="850">
                           <a:solidFill>
                             <a:srgbClr val="0F172A"/>
                           </a:solidFill>
@@ -11283,6 +13054,100 @@
                   <a:tcPr>
                     <a:solidFill>
                       <a:srgbClr val="F8FAFC"/>
+                    </a:solidFill>
+                  </a:tcPr>
+                </a:tc>
+              </a:tr>
+              <a:tr h="611505">
+                <a:tc>
+                  <a:txBody>
+                    <a:bodyPr/>
+                    <a:lstStyle/>
+                    <a:p>
+                      <a:pPr>
+                        <a:defRPr sz="850">
+                          <a:solidFill>
+                            <a:srgbClr val="0F172A"/>
+                          </a:solidFill>
+                        </a:defRPr>
+                      </a:pPr>
+                      <a:r>
+                        <a:t>7. Future Implementation</a:t>
+                      </a:r>
+                    </a:p>
+                  </a:txBody>
+                  <a:tcPr>
+                    <a:solidFill>
+                      <a:srgbClr val="FFFFFF"/>
+                    </a:solidFill>
+                  </a:tcPr>
+                </a:tc>
+                <a:tc>
+                  <a:txBody>
+                    <a:bodyPr/>
+                    <a:lstStyle/>
+                    <a:p>
+                      <a:pPr>
+                        <a:defRPr sz="850" b="1">
+                          <a:solidFill>
+                            <a:srgbClr val="D97706"/>
+                          </a:solidFill>
+                        </a:defRPr>
+                      </a:pPr>
+                      <a:r>
+                        <a:t>Jury Advisory</a:t>
+                      </a:r>
+                    </a:p>
+                  </a:txBody>
+                  <a:tcPr>
+                    <a:solidFill>
+                      <a:srgbClr val="FFFFFF"/>
+                    </a:solidFill>
+                  </a:tcPr>
+                </a:tc>
+                <a:tc>
+                  <a:txBody>
+                    <a:bodyPr/>
+                    <a:lstStyle/>
+                    <a:p>
+                      <a:pPr>
+                        <a:defRPr sz="850" b="1">
+                          <a:solidFill>
+                            <a:srgbClr val="2563EB"/>
+                          </a:solidFill>
+                        </a:defRPr>
+                      </a:pPr>
+                      <a:r>
+                        <a:t>Slides 16-17</a:t>
+                      </a:r>
+                    </a:p>
+                  </a:txBody>
+                  <a:tcPr>
+                    <a:solidFill>
+                      <a:srgbClr val="FFFFFF"/>
+                    </a:solidFill>
+                  </a:tcPr>
+                </a:tc>
+                <a:tc>
+                  <a:txBody>
+                    <a:bodyPr/>
+                    <a:lstStyle/>
+                    <a:p>
+                      <a:pPr>
+                        <a:defRPr sz="850">
+                          <a:solidFill>
+                            <a:srgbClr val="0F172A"/>
+                          </a:solidFill>
+                        </a:defRPr>
+                      </a:pPr>
+                      <a:r>
+                        <a:t>Top 30 Jury Enhancements: Proctored Skill Verification (10-Q, 80% pass), Anti-Cheat Sandbox, Dynamic Resume, AI Viva.</a:t>
+                      </a:r>
+                    </a:p>
+                  </a:txBody>
+                  <a:tcPr>
+                    <a:solidFill>
+                      <a:srgbClr val="FFFFFF"/>
                     </a:solidFill>
                   </a:tcPr>
                 </a:tc>
@@ -11436,7 +13301,7 @@
               </a:defRPr>
             </a:pPr>
             <a:r>
-              <a:t>03 / 16</a:t>
+              <a:t>03 / 18</a:t>
             </a:r>
           </a:p>
         </p:txBody>
@@ -12161,7 +14026,7 @@
               </a:defRPr>
             </a:pPr>
             <a:r>
-              <a:t>04 / 16</a:t>
+              <a:t>04 / 18</a:t>
             </a:r>
           </a:p>
         </p:txBody>
@@ -13218,7 +15083,7 @@
               </a:defRPr>
             </a:pPr>
             <a:r>
-              <a:t>05 / 16</a:t>
+              <a:t>05 / 18</a:t>
             </a:r>
           </a:p>
         </p:txBody>
@@ -14320,7 +16185,7 @@
               </a:defRPr>
             </a:pPr>
             <a:r>
-              <a:t>06 / 16</a:t>
+              <a:t>06 / 18</a:t>
             </a:r>
           </a:p>
         </p:txBody>
@@ -15353,7 +17218,7 @@
               </a:defRPr>
             </a:pPr>
             <a:r>
-              <a:t>07 / 16</a:t>
+              <a:t>07 / 18</a:t>
             </a:r>
           </a:p>
         </p:txBody>
@@ -15893,7 +17758,7 @@
               </a:defRPr>
             </a:pPr>
             <a:r>
-              <a:t>08 / 16</a:t>
+              <a:t>08 / 18</a:t>
             </a:r>
           </a:p>
         </p:txBody>
@@ -16867,7 +18732,7 @@
               </a:defRPr>
             </a:pPr>
             <a:r>
-              <a:t>09 / 16</a:t>
+              <a:t>09 / 18</a:t>
             </a:r>
           </a:p>
         </p:txBody>
